--- a/m4/diapositivos/sessao-05-m4-f15.pptx
+++ b/m4/diapositivos/sessao-05-m4-f15.pptx
@@ -2598,7 +2598,35 @@
                 <a:ea typeface="Arial" pitchFamily="34" charset="-122"/>
                 <a:cs typeface="Arial" pitchFamily="34" charset="-120"/>
               </a:rPr>
-              <a:t>Padre António Vieira, Sermão de Santo António (1654), ortografia atualizada, cap. IV.</a:t>
+              <a:t>Padre António Vieira, </a:t>
+            </a:r>
+            <a:pPr indent="0" marL="0">
+              <a:buNone/>
+            </a:pPr>
+            <a:r>
+              <a:rPr lang="en-US" sz="1200" i="1" dirty="0">
+                <a:solidFill>
+                  <a:srgbClr val="A9A79F"/>
+                </a:solidFill>
+                <a:latin typeface="Arial" pitchFamily="34" charset="0"/>
+                <a:ea typeface="Arial" pitchFamily="34" charset="-122"/>
+                <a:cs typeface="Arial" pitchFamily="34" charset="-120"/>
+              </a:rPr>
+              <a:t>Sermão de Santo António</a:t>
+            </a:r>
+            <a:pPr indent="0" marL="0">
+              <a:buNone/>
+            </a:pPr>
+            <a:r>
+              <a:rPr lang="en-US" sz="1200" dirty="0">
+                <a:solidFill>
+                  <a:srgbClr val="A9A79F"/>
+                </a:solidFill>
+                <a:latin typeface="Arial" pitchFamily="34" charset="0"/>
+                <a:ea typeface="Arial" pitchFamily="34" charset="-122"/>
+                <a:cs typeface="Arial" pitchFamily="34" charset="-120"/>
+              </a:rPr>
+              <a:t> (1654), ortografia atualizada, cap. IV.</a:t>
             </a:r>
             <a:endParaRPr lang="en-US" sz="1200" dirty="0"/>
           </a:p>
@@ -4749,13 +4777,10 @@
               <a:lnSpc>
                 <a:spcPct val="120000"/>
               </a:lnSpc>
-              <a:spcAft>
-                <a:spcPts val="1000"/>
-              </a:spcAft>
-              <a:buNone/>
-            </a:pPr>
-            <a:r>
-              <a:rPr lang="en-US" sz="2300" dirty="0">
+              <a:buNone/>
+            </a:pPr>
+            <a:r>
+              <a:rPr lang="en-US" sz="2300" b="1" dirty="0">
                 <a:solidFill>
                   <a:srgbClr val="F2F0EA"/>
                 </a:solidFill>
@@ -4763,18 +4788,12 @@
                 <a:ea typeface="Georgia" pitchFamily="34" charset="-122"/>
                 <a:cs typeface="Georgia" pitchFamily="34" charset="-120"/>
               </a:rPr>
-              <a:t>Coerência: o texto faz sentido, sem contradições, e progride (cada frase acrescenta informação).</a:t>
-            </a:r>
-            <a:endParaRPr lang="en-US" sz="2300" dirty="0"/>
-          </a:p>
-          <a:p>
+              <a:t>Coerência</a:t>
+            </a:r>
             <a:pPr indent="0" marL="0">
               <a:lnSpc>
                 <a:spcPct val="120000"/>
               </a:lnSpc>
-              <a:spcAft>
-                <a:spcPts val="1000"/>
-              </a:spcAft>
               <a:buNone/>
             </a:pPr>
             <a:r>
@@ -4786,22 +4805,16 @@
                 <a:ea typeface="Georgia" pitchFamily="34" charset="-122"/>
                 <a:cs typeface="Georgia" pitchFamily="34" charset="-120"/>
               </a:rPr>
-              <a:t>Coesão: as ligações visíveis entre palavras e frases.</a:t>
-            </a:r>
-            <a:endParaRPr lang="en-US" sz="2300" dirty="0"/>
-          </a:p>
-          <a:p>
+              <a:t>: o texto faz sentido, sem contradições, e progride (cada frase acrescenta informação). </a:t>
+            </a:r>
             <a:pPr indent="0" marL="0">
               <a:lnSpc>
                 <a:spcPct val="120000"/>
               </a:lnSpc>
-              <a:spcAft>
-                <a:spcPts val="1000"/>
-              </a:spcAft>
-              <a:buNone/>
-            </a:pPr>
-            <a:r>
-              <a:rPr lang="en-US" sz="2300" dirty="0">
+              <a:buNone/>
+            </a:pPr>
+            <a:r>
+              <a:rPr lang="en-US" sz="2300" b="1" dirty="0">
                 <a:solidFill>
                   <a:srgbClr val="F2F0EA"/>
                 </a:solidFill>
@@ -4809,18 +4822,12 @@
                 <a:ea typeface="Georgia" pitchFamily="34" charset="-122"/>
                 <a:cs typeface="Georgia" pitchFamily="34" charset="-120"/>
               </a:rPr>
-              <a:t>Gramatical: pronomes e determinantes que retomam (anáfora), conectores, concordâncias, tempos verbais.</a:t>
-            </a:r>
-            <a:endParaRPr lang="en-US" sz="2300" dirty="0"/>
-          </a:p>
-          <a:p>
+              <a:t>Coesão</a:t>
+            </a:r>
             <a:pPr indent="0" marL="0">
               <a:lnSpc>
                 <a:spcPct val="120000"/>
               </a:lnSpc>
-              <a:spcAft>
-                <a:spcPts val="1000"/>
-              </a:spcAft>
               <a:buNone/>
             </a:pPr>
             <a:r>
@@ -4832,7 +4839,75 @@
                 <a:ea typeface="Georgia" pitchFamily="34" charset="-122"/>
                 <a:cs typeface="Georgia" pitchFamily="34" charset="-120"/>
               </a:rPr>
-              <a:t>Lexical: repetição, sinónimos, palavras da mesma família ou do mesmo campo.</a:t>
+              <a:t>: as ligações visíveis entre palavras e frases. </a:t>
+            </a:r>
+            <a:pPr indent="0" marL="0">
+              <a:lnSpc>
+                <a:spcPct val="120000"/>
+              </a:lnSpc>
+              <a:buNone/>
+            </a:pPr>
+            <a:r>
+              <a:rPr lang="en-US" sz="2300" b="1" dirty="0">
+                <a:solidFill>
+                  <a:srgbClr val="F2F0EA"/>
+                </a:solidFill>
+                <a:latin typeface="Georgia" pitchFamily="34" charset="0"/>
+                <a:ea typeface="Georgia" pitchFamily="34" charset="-122"/>
+                <a:cs typeface="Georgia" pitchFamily="34" charset="-120"/>
+              </a:rPr>
+              <a:t>Gramatical</a:t>
+            </a:r>
+            <a:pPr indent="0" marL="0">
+              <a:lnSpc>
+                <a:spcPct val="120000"/>
+              </a:lnSpc>
+              <a:buNone/>
+            </a:pPr>
+            <a:r>
+              <a:rPr lang="en-US" sz="2300" dirty="0">
+                <a:solidFill>
+                  <a:srgbClr val="F2F0EA"/>
+                </a:solidFill>
+                <a:latin typeface="Georgia" pitchFamily="34" charset="0"/>
+                <a:ea typeface="Georgia" pitchFamily="34" charset="-122"/>
+                <a:cs typeface="Georgia" pitchFamily="34" charset="-120"/>
+              </a:rPr>
+              <a:t>: pronomes e determinantes que retomam (anáfora), conectores, concordâncias, tempos verbais. </a:t>
+            </a:r>
+            <a:pPr indent="0" marL="0">
+              <a:lnSpc>
+                <a:spcPct val="120000"/>
+              </a:lnSpc>
+              <a:buNone/>
+            </a:pPr>
+            <a:r>
+              <a:rPr lang="en-US" sz="2300" b="1" dirty="0">
+                <a:solidFill>
+                  <a:srgbClr val="F2F0EA"/>
+                </a:solidFill>
+                <a:latin typeface="Georgia" pitchFamily="34" charset="0"/>
+                <a:ea typeface="Georgia" pitchFamily="34" charset="-122"/>
+                <a:cs typeface="Georgia" pitchFamily="34" charset="-120"/>
+              </a:rPr>
+              <a:t>Lexical</a:t>
+            </a:r>
+            <a:pPr indent="0" marL="0">
+              <a:lnSpc>
+                <a:spcPct val="120000"/>
+              </a:lnSpc>
+              <a:buNone/>
+            </a:pPr>
+            <a:r>
+              <a:rPr lang="en-US" sz="2300" dirty="0">
+                <a:solidFill>
+                  <a:srgbClr val="F2F0EA"/>
+                </a:solidFill>
+                <a:latin typeface="Georgia" pitchFamily="34" charset="0"/>
+                <a:ea typeface="Georgia" pitchFamily="34" charset="-122"/>
+                <a:cs typeface="Georgia" pitchFamily="34" charset="-120"/>
+              </a:rPr>
+              <a:t>: repetição, sinónimos, palavras da mesma família ou do mesmo campo.</a:t>
             </a:r>
             <a:endParaRPr lang="en-US" sz="2300" dirty="0"/>
           </a:p>
